--- a/reports/Bystyret_M10_Okonomi_Rapport.pptx
+++ b/reports/Bystyret_M10_Okonomi_Rapport.pptx
@@ -3151,7 +3151,7 @@
               </a:defRPr>
             </a:pPr>
             <a:r>
-              <a:t>Generert av Antigravity Control Hub: 2026-10-17 21:05 | Saksbehandler: Frank Ellingsen, Senior Financial Controller</a:t>
+              <a:t>Generert av Antigravity Control Hub: 2026-10-17 21:38 | Saksbehandler: Frank Ellingsen, Senior Financial Controller</a:t>
             </a:r>
           </a:p>
           <a:p>

--- a/reports/Bystyret_M10_Okonomi_Rapport.pptx
+++ b/reports/Bystyret_M10_Okonomi_Rapport.pptx
@@ -3151,7 +3151,7 @@
               </a:defRPr>
             </a:pPr>
             <a:r>
-              <a:t>Generert av Antigravity Control Hub: 2026-10-17 21:38 | Saksbehandler: Frank Ellingsen, Senior Financial Controller</a:t>
+              <a:t>Generert av Antigravity Control Hub: 2026-10-17 22:14 | Saksbehandler: Frank Ellingsen, Senior Financial Controller</a:t>
             </a:r>
           </a:p>
           <a:p>

--- a/reports/Bystyret_M10_Okonomi_Rapport.pptx
+++ b/reports/Bystyret_M10_Okonomi_Rapport.pptx
@@ -3151,7 +3151,7 @@
               </a:defRPr>
             </a:pPr>
             <a:r>
-              <a:t>Generert av Antigravity Control Hub: 2026-10-17 22:14 | Saksbehandler: Frank Ellingsen, Senior Financial Controller</a:t>
+              <a:t>Generert av Antigravity Control Hub: 2026-10-18 12:21 | Saksbehandler: Frank Ellingsen, Senior Financial Controller</a:t>
             </a:r>
           </a:p>
           <a:p>
@@ -4084,7 +4084,7 @@
             </a:r>
             <a:br/>
             <a:r>
-              <a:t>2026-10-17</a:t>
+              <a:t>2026-10-18</a:t>
             </a:r>
           </a:p>
           <a:p>

--- a/reports/Bystyret_M10_Okonomi_Rapport.pptx
+++ b/reports/Bystyret_M10_Okonomi_Rapport.pptx
@@ -3151,7 +3151,7 @@
               </a:defRPr>
             </a:pPr>
             <a:r>
-              <a:t>Generert av Antigravity Control Hub: 2026-10-18 12:21 | Saksbehandler: Frank Ellingsen, Senior Financial Controller</a:t>
+              <a:t>Generert av Antigravity Control Hub: 2026-10-18 12:37 | Saksbehandler: Frank Ellingsen, Senior Financial Controller</a:t>
             </a:r>
           </a:p>
           <a:p>

--- a/reports/Bystyret_M10_Okonomi_Rapport.pptx
+++ b/reports/Bystyret_M10_Okonomi_Rapport.pptx
@@ -3151,7 +3151,7 @@
               </a:defRPr>
             </a:pPr>
             <a:r>
-              <a:t>Generert av Antigravity Control Hub: 2026-10-18 12:37 | Saksbehandler: Frank Ellingsen, Senior Financial Controller</a:t>
+              <a:t>Generert av Antigravity Control Hub: 2026-10-18 13:07 | Saksbehandler: Frank Ellingsen, Senior Financial Controller</a:t>
             </a:r>
           </a:p>
           <a:p>

--- a/reports/Bystyret_M10_Okonomi_Rapport.pptx
+++ b/reports/Bystyret_M10_Okonomi_Rapport.pptx
@@ -3151,7 +3151,7 @@
               </a:defRPr>
             </a:pPr>
             <a:r>
-              <a:t>Generert av Antigravity Control Hub: 2026-10-18 13:07 | Saksbehandler: Frank Ellingsen, Senior Financial Controller</a:t>
+              <a:t>Generert av Antigravity Control Hub: 2026-10-18 13:29 | Saksbehandler: Frank Ellingsen, Senior Financial Controller</a:t>
             </a:r>
           </a:p>
           <a:p>

--- a/reports/Bystyret_M10_Okonomi_Rapport.pptx
+++ b/reports/Bystyret_M10_Okonomi_Rapport.pptx
@@ -3151,7 +3151,7 @@
               </a:defRPr>
             </a:pPr>
             <a:r>
-              <a:t>Generert av Antigravity Control Hub: 2026-10-18 13:29 | Saksbehandler: Frank Ellingsen, Senior Financial Controller</a:t>
+              <a:t>Generert av Antigravity Control Hub: 2026-10-18 13:53 | Saksbehandler: Frank Ellingsen, Senior Financial Controller</a:t>
             </a:r>
           </a:p>
           <a:p>

--- a/reports/Bystyret_M10_Okonomi_Rapport.pptx
+++ b/reports/Bystyret_M10_Okonomi_Rapport.pptx
@@ -3151,7 +3151,7 @@
               </a:defRPr>
             </a:pPr>
             <a:r>
-              <a:t>Generert av Antigravity Control Hub: 2026-10-18 13:53 | Saksbehandler: Frank Ellingsen, Senior Financial Controller</a:t>
+              <a:t>Generert av Antigravity Control Hub: 2026-10-18 17:08 | Saksbehandler: Frank Ellingsen, Senior Financial Controller</a:t>
             </a:r>
           </a:p>
           <a:p>

--- a/reports/Bystyret_M10_Okonomi_Rapport.pptx
+++ b/reports/Bystyret_M10_Okonomi_Rapport.pptx
@@ -3151,7 +3151,7 @@
               </a:defRPr>
             </a:pPr>
             <a:r>
-              <a:t>Generert av Antigravity Control Hub: 2026-10-18 17:08 | Saksbehandler: Frank Ellingsen, Senior Financial Controller</a:t>
+              <a:t>Generert av Antigravity Control Hub: 2026-10-18 17:21 | Saksbehandler: Frank Ellingsen, Senior Financial Controller</a:t>
             </a:r>
           </a:p>
           <a:p>

--- a/reports/Bystyret_M10_Okonomi_Rapport.pptx
+++ b/reports/Bystyret_M10_Okonomi_Rapport.pptx
@@ -3151,7 +3151,7 @@
               </a:defRPr>
             </a:pPr>
             <a:r>
-              <a:t>Generert av Antigravity Control Hub: 2026-10-18 17:21 | Saksbehandler: Frank Ellingsen, Senior Financial Controller</a:t>
+              <a:t>Generert av Antigravity Control Hub: 2026-10-19 13:18 | Saksbehandler: Frank Ellingsen, Senior Financial Controller</a:t>
             </a:r>
           </a:p>
           <a:p>
@@ -4084,7 +4084,7 @@
             </a:r>
             <a:br/>
             <a:r>
-              <a:t>2026-10-18</a:t>
+              <a:t>2026-10-19</a:t>
             </a:r>
           </a:p>
           <a:p>

--- a/reports/Bystyret_M10_Okonomi_Rapport.pptx
+++ b/reports/Bystyret_M10_Okonomi_Rapport.pptx
@@ -3151,7 +3151,7 @@
               </a:defRPr>
             </a:pPr>
             <a:r>
-              <a:t>Generert av Antigravity Control Hub: 2026-10-19 13:18 | Saksbehandler: Frank Ellingsen, Senior Financial Controller</a:t>
+              <a:t>Generert av Antigravity Control Hub: 2026-10-19 14:33 | Saksbehandler: Frank Ellingsen, Senior Financial Controller</a:t>
             </a:r>
           </a:p>
           <a:p>

--- a/reports/Bystyret_M10_Okonomi_Rapport.pptx
+++ b/reports/Bystyret_M10_Okonomi_Rapport.pptx
@@ -3151,7 +3151,7 @@
               </a:defRPr>
             </a:pPr>
             <a:r>
-              <a:t>Generert av Antigravity Control Hub: 2026-10-19 14:33 | Saksbehandler: Frank Ellingsen, Senior Financial Controller</a:t>
+              <a:t>Generert av Antigravity Control Hub: 2026-10-19 15:37 | Saksbehandler: Frank Ellingsen, Senior Financial Controller</a:t>
             </a:r>
           </a:p>
           <a:p>

--- a/reports/Bystyret_M10_Okonomi_Rapport.pptx
+++ b/reports/Bystyret_M10_Okonomi_Rapport.pptx
@@ -3151,7 +3151,7 @@
               </a:defRPr>
             </a:pPr>
             <a:r>
-              <a:t>Generert av Antigravity Control Hub: 2026-10-19 15:37 | Saksbehandler: Frank Ellingsen, Senior Financial Controller</a:t>
+              <a:t>Generert av Antigravity Control Hub: 2026-10-19 15:54 | Saksbehandler: Frank Ellingsen, Senior Financial Controller</a:t>
             </a:r>
           </a:p>
           <a:p>

--- a/reports/Bystyret_M10_Okonomi_Rapport.pptx
+++ b/reports/Bystyret_M10_Okonomi_Rapport.pptx
@@ -3151,7 +3151,7 @@
               </a:defRPr>
             </a:pPr>
             <a:r>
-              <a:t>Generert av Antigravity Control Hub: 2026-10-19 15:54 | Saksbehandler: Frank Ellingsen, Senior Financial Controller</a:t>
+              <a:t>Generert av Antigravity Control Hub: 2026-10-19 17:00 | Saksbehandler: Frank Ellingsen, Senior Financial Controller</a:t>
             </a:r>
           </a:p>
           <a:p>

--- a/reports/Bystyret_M10_Okonomi_Rapport.pptx
+++ b/reports/Bystyret_M10_Okonomi_Rapport.pptx
@@ -3151,7 +3151,7 @@
               </a:defRPr>
             </a:pPr>
             <a:r>
-              <a:t>Generert av Antigravity Control Hub: 2026-10-19 17:00 | Saksbehandler: Frank Ellingsen, Senior Financial Controller</a:t>
+              <a:t>Generert av Antigravity Control Hub: 2026-10-19 17:57 | Saksbehandler: Frank Ellingsen, Senior Financial Controller</a:t>
             </a:r>
           </a:p>
           <a:p>

--- a/reports/Bystyret_M10_Okonomi_Rapport.pptx
+++ b/reports/Bystyret_M10_Okonomi_Rapport.pptx
@@ -3151,7 +3151,7 @@
               </a:defRPr>
             </a:pPr>
             <a:r>
-              <a:t>Generert av Antigravity Control Hub: 2026-10-19 17:57 | Saksbehandler: Frank Ellingsen, Senior Financial Controller</a:t>
+              <a:t>Generert av Antigravity Control Hub: 2026-10-19 19:44 | Saksbehandler: Frank Ellingsen, Senior Financial Controller</a:t>
             </a:r>
           </a:p>
           <a:p>

--- a/reports/Bystyret_M10_Okonomi_Rapport.pptx
+++ b/reports/Bystyret_M10_Okonomi_Rapport.pptx
@@ -3151,7 +3151,7 @@
               </a:defRPr>
             </a:pPr>
             <a:r>
-              <a:t>Generert av Antigravity Control Hub: 2026-10-19 19:44 | Saksbehandler: Frank Ellingsen, Senior Financial Controller</a:t>
+              <a:t>Generert av Antigravity Control Hub: 2026-10-19 22:22 | Saksbehandler: Frank Ellingsen, Senior Financial Controller</a:t>
             </a:r>
           </a:p>
           <a:p>

--- a/reports/Bystyret_M10_Okonomi_Rapport.pptx
+++ b/reports/Bystyret_M10_Okonomi_Rapport.pptx
@@ -3151,7 +3151,7 @@
               </a:defRPr>
             </a:pPr>
             <a:r>
-              <a:t>Generert av Antigravity Control Hub: 2026-10-19 22:22 | Saksbehandler: Frank Ellingsen, Senior Financial Controller</a:t>
+              <a:t>Generert av Antigravity Control Hub: 2026-10-20 09:35 | Saksbehandler: Frank Ellingsen, Senior Financial Controller</a:t>
             </a:r>
           </a:p>
           <a:p>
@@ -4084,7 +4084,7 @@
             </a:r>
             <a:br/>
             <a:r>
-              <a:t>2026-10-19</a:t>
+              <a:t>2026-10-20</a:t>
             </a:r>
           </a:p>
           <a:p>

--- a/reports/Bystyret_M10_Okonomi_Rapport.pptx
+++ b/reports/Bystyret_M10_Okonomi_Rapport.pptx
@@ -3151,7 +3151,7 @@
               </a:defRPr>
             </a:pPr>
             <a:r>
-              <a:t>Generert av Antigravity Control Hub: 2026-10-20 09:35 | Saksbehandler: Frank Ellingsen, Senior Financial Controller</a:t>
+              <a:t>Generert av Antigravity Control Hub: 2026-10-20 10:40 | Saksbehandler: Frank Ellingsen, Senior Financial Controller</a:t>
             </a:r>
           </a:p>
           <a:p>

--- a/reports/Bystyret_M10_Okonomi_Rapport.pptx
+++ b/reports/Bystyret_M10_Okonomi_Rapport.pptx
@@ -3151,7 +3151,7 @@
               </a:defRPr>
             </a:pPr>
             <a:r>
-              <a:t>Generert av Antigravity Control Hub: 2026-10-20 10:40 | Saksbehandler: Frank Ellingsen, Senior Financial Controller</a:t>
+              <a:t>Generert av Antigravity Control Hub: 2026-10-20 13:01 | Saksbehandler: Frank Ellingsen, Senior Financial Controller</a:t>
             </a:r>
           </a:p>
           <a:p>

--- a/reports/Bystyret_M10_Okonomi_Rapport.pptx
+++ b/reports/Bystyret_M10_Okonomi_Rapport.pptx
@@ -3151,7 +3151,7 @@
               </a:defRPr>
             </a:pPr>
             <a:r>
-              <a:t>Generert av Antigravity Control Hub: 2026-10-20 13:01 | Saksbehandler: Frank Ellingsen, Senior Financial Controller</a:t>
+              <a:t>Generert av Antigravity Control Hub: 2026-10-20 16:50 | Saksbehandler: Frank Ellingsen, Senior Financial Controller</a:t>
             </a:r>
           </a:p>
           <a:p>

--- a/reports/Bystyret_M10_Okonomi_Rapport.pptx
+++ b/reports/Bystyret_M10_Okonomi_Rapport.pptx
@@ -3151,7 +3151,7 @@
               </a:defRPr>
             </a:pPr>
             <a:r>
-              <a:t>Generert av Antigravity Control Hub: 2026-10-20 16:50 | Saksbehandler: Frank Ellingsen, Senior Financial Controller</a:t>
+              <a:t>Generert av Antigravity Control Hub: 2026-10-20 17:54 | Saksbehandler: Frank Ellingsen, Senior Financial Controller</a:t>
             </a:r>
           </a:p>
           <a:p>

--- a/reports/Bystyret_M10_Okonomi_Rapport.pptx
+++ b/reports/Bystyret_M10_Okonomi_Rapport.pptx
@@ -3151,7 +3151,7 @@
               </a:defRPr>
             </a:pPr>
             <a:r>
-              <a:t>Generert av Antigravity Control Hub: 2026-10-20 17:54 | Saksbehandler: Frank Ellingsen, Senior Financial Controller</a:t>
+              <a:t>Generert av Antigravity Control Hub: 2026-10-20 19:11 | Saksbehandler: Frank Ellingsen, Senior Financial Controller</a:t>
             </a:r>
           </a:p>
           <a:p>

--- a/reports/Bystyret_M10_Okonomi_Rapport.pptx
+++ b/reports/Bystyret_M10_Okonomi_Rapport.pptx
@@ -3151,7 +3151,7 @@
               </a:defRPr>
             </a:pPr>
             <a:r>
-              <a:t>Generert av Antigravity Control Hub: 2026-10-20 19:11 | Saksbehandler: Frank Ellingsen, Senior Financial Controller</a:t>
+              <a:t>Generert av Antigravity Control Hub: 2026-10-21 09:49 | Saksbehandler: Frank Ellingsen, Senior Financial Controller</a:t>
             </a:r>
           </a:p>
           <a:p>
@@ -4084,7 +4084,7 @@
             </a:r>
             <a:br/>
             <a:r>
-              <a:t>2026-10-20</a:t>
+              <a:t>2026-10-21</a:t>
             </a:r>
           </a:p>
           <a:p>

--- a/reports/Bystyret_M10_Okonomi_Rapport.pptx
+++ b/reports/Bystyret_M10_Okonomi_Rapport.pptx
@@ -3151,7 +3151,7 @@
               </a:defRPr>
             </a:pPr>
             <a:r>
-              <a:t>Generert av Antigravity Control Hub: 2026-10-21 09:49 | Saksbehandler: Frank Ellingsen, Senior Financial Controller</a:t>
+              <a:t>Generert av Antigravity Control Hub: 2026-10-27 15:32 | Saksbehandler: Frank Ellingsen, Senior Financial Controller</a:t>
             </a:r>
           </a:p>
           <a:p>
@@ -4084,7 +4084,7 @@
             </a:r>
             <a:br/>
             <a:r>
-              <a:t>2026-10-21</a:t>
+              <a:t>2026-10-27</a:t>
             </a:r>
           </a:p>
           <a:p>
